--- a/Konfigurasi NAT pada Ubuntu Server Lab2.pptx
+++ b/Konfigurasi NAT pada Ubuntu Server Lab2.pptx
@@ -10315,9 +10315,10 @@
           <a:lstStyle/>
           <a:p>
             <a:r>
-              <a:rPr lang="en-US" sz="900" dirty="0"/>
+              <a:rPr lang="en-US" sz="900" dirty="0" smtClean="0"/>
               <a:t>https://github.com/amelcharolinesgn2/Cloud-Infrastructures</a:t>
             </a:r>
+            <a:endParaRPr lang="en-US" sz="900" dirty="0"/>
           </a:p>
         </p:txBody>
       </p:sp>
@@ -11644,6 +11645,82 @@
                 </a:solidFill>
               </a:rPr>
               <a:t>192.168.68.10</a:t>
+            </a:r>
+            <a:endParaRPr lang="en-US" sz="700" dirty="0">
+              <a:solidFill>
+                <a:schemeClr val="bg1">
+                  <a:lumMod val="85000"/>
+                </a:schemeClr>
+              </a:solidFill>
+            </a:endParaRPr>
+          </a:p>
+        </p:txBody>
+      </p:sp>
+      <p:pic>
+        <p:nvPicPr>
+          <p:cNvPr id="7" name="Picture 6"/>
+          <p:cNvPicPr>
+            <a:picLocks noChangeAspect="1"/>
+          </p:cNvPicPr>
+          <p:nvPr/>
+        </p:nvPicPr>
+        <p:blipFill>
+          <a:blip r:embed="rId4"/>
+          <a:stretch>
+            <a:fillRect/>
+          </a:stretch>
+        </p:blipFill>
+        <p:spPr>
+          <a:xfrm>
+            <a:off x="4822968" y="2806412"/>
+            <a:ext cx="3028950" cy="2076450"/>
+          </a:xfrm>
+          <a:prstGeom prst="rect">
+            <a:avLst/>
+          </a:prstGeom>
+        </p:spPr>
+      </p:pic>
+      <p:sp>
+        <p:nvSpPr>
+          <p:cNvPr id="8" name="TextBox 7"/>
+          <p:cNvSpPr txBox="1"/>
+          <p:nvPr/>
+        </p:nvSpPr>
+        <p:spPr>
+          <a:xfrm>
+            <a:off x="5707623" y="3007347"/>
+            <a:ext cx="505267" cy="200055"/>
+          </a:xfrm>
+          <a:prstGeom prst="rect">
+            <a:avLst/>
+          </a:prstGeom>
+          <a:noFill/>
+        </p:spPr>
+        <p:txBody>
+          <a:bodyPr wrap="none" rtlCol="0">
+            <a:spAutoFit/>
+          </a:bodyPr>
+          <a:lstStyle/>
+          <a:p>
+            <a:r>
+              <a:rPr lang="en-US" sz="700" dirty="0">
+                <a:solidFill>
+                  <a:schemeClr val="bg1">
+                    <a:lumMod val="85000"/>
+                  </a:schemeClr>
+                </a:solidFill>
+              </a:rPr>
+              <a:t>v</a:t>
+            </a:r>
+            <a:r>
+              <a:rPr lang="en-US" sz="700" dirty="0" smtClean="0">
+                <a:solidFill>
+                  <a:schemeClr val="bg1">
+                    <a:lumMod val="85000"/>
+                  </a:schemeClr>
+                </a:solidFill>
+              </a:rPr>
+              <a:t>ias.com</a:t>
             </a:r>
             <a:endParaRPr lang="en-US" sz="700" dirty="0">
               <a:solidFill>
